--- a/Dissertation_Briefing_704.pptx
+++ b/Dissertation_Briefing_704.pptx
@@ -208,7 +208,7 @@
           <a:p>
             <a:fld id="{771DD892-7AB0-B44D-B232-A583B63FD29B}" type="datetimeFigureOut">
               <a:rPr lang="en-US" smtClean="0"/>
-              <a:t>7/1/25</a:t>
+              <a:t>7/15/25</a:t>
             </a:fld>
             <a:endParaRPr lang="en-US"/>
           </a:p>
@@ -1052,7 +1052,7 @@
           <a:p>
             <a:fld id="{6444479B-705B-4489-957E-7E8A228BDFA0}" type="datetime1">
               <a:rPr lang="en-US" smtClean="0"/>
-              <a:t>7/1/25</a:t>
+              <a:t>7/15/25</a:t>
             </a:fld>
             <a:endParaRPr lang="en-US"/>
           </a:p>
@@ -1252,7 +1252,7 @@
           <a:p>
             <a:fld id="{C07B66AD-7C08-490A-ADA4-B47E10FB2407}" type="datetime1">
               <a:rPr lang="en-US" smtClean="0"/>
-              <a:t>7/1/25</a:t>
+              <a:t>7/15/25</a:t>
             </a:fld>
             <a:endParaRPr lang="en-US"/>
           </a:p>
@@ -1511,7 +1511,7 @@
           <a:p>
             <a:fld id="{05B95027-4255-49E7-9841-CD21BCC99996}" type="datetime1">
               <a:rPr lang="en-US" smtClean="0"/>
-              <a:t>7/1/25</a:t>
+              <a:t>7/15/25</a:t>
             </a:fld>
             <a:endParaRPr lang="en-US"/>
           </a:p>
@@ -1752,7 +1752,7 @@
           <a:p>
             <a:fld id="{9F89F774-3FA6-43B8-9241-99959C8FD463}" type="datetime1">
               <a:rPr lang="en-US" smtClean="0"/>
-              <a:t>7/1/25</a:t>
+              <a:t>7/15/25</a:t>
             </a:fld>
             <a:endParaRPr lang="en-US"/>
           </a:p>
@@ -2079,7 +2079,7 @@
           <a:p>
             <a:fld id="{F9504452-5DCC-4FE2-A5C9-8A5EF6714D65}" type="datetime1">
               <a:rPr lang="en-US" smtClean="0"/>
-              <a:t>7/1/25</a:t>
+              <a:t>7/15/25</a:t>
             </a:fld>
             <a:endParaRPr lang="en-US"/>
           </a:p>
@@ -2389,7 +2389,7 @@
           <a:p>
             <a:fld id="{E579ABC2-0180-4F3A-A895-A85BC724D472}" type="datetime1">
               <a:rPr lang="en-US" smtClean="0"/>
-              <a:t>7/1/25</a:t>
+              <a:t>7/15/25</a:t>
             </a:fld>
             <a:endParaRPr lang="en-US"/>
           </a:p>
@@ -2807,7 +2807,7 @@
           <a:p>
             <a:fld id="{6AEEA9BA-4E8F-439E-BEA4-91FBA01E3F5F}" type="datetime1">
               <a:rPr lang="en-US" smtClean="0"/>
-              <a:t>7/1/25</a:t>
+              <a:t>7/15/25</a:t>
             </a:fld>
             <a:endParaRPr lang="en-US"/>
           </a:p>
@@ -2949,7 +2949,7 @@
           <a:p>
             <a:fld id="{BE15BF18-0007-481C-AA29-413124BC3EE7}" type="datetime1">
               <a:rPr lang="en-US" smtClean="0"/>
-              <a:t>7/1/25</a:t>
+              <a:t>7/15/25</a:t>
             </a:fld>
             <a:endParaRPr lang="en-US"/>
           </a:p>
@@ -3111,7 +3111,7 @@
           <a:p>
             <a:fld id="{09BE9870-3748-43AD-B547-02A075CB4A1D}" type="datetime1">
               <a:rPr lang="en-US" smtClean="0"/>
-              <a:t>7/1/25</a:t>
+              <a:t>7/15/25</a:t>
             </a:fld>
             <a:endParaRPr lang="en-US"/>
           </a:p>
@@ -3428,7 +3428,7 @@
           <a:p>
             <a:fld id="{558E7897-33C5-4F1A-9307-D068E37F3DC7}" type="datetime1">
               <a:rPr lang="en-US" smtClean="0"/>
-              <a:t>7/1/25</a:t>
+              <a:t>7/15/25</a:t>
             </a:fld>
             <a:endParaRPr lang="en-US"/>
           </a:p>
@@ -3723,7 +3723,7 @@
           <a:p>
             <a:fld id="{82E171BA-CC09-47C8-A6DF-F5C5CB59CEEC}" type="datetime1">
               <a:rPr lang="en-US" smtClean="0"/>
-              <a:t>7/1/25</a:t>
+              <a:t>7/15/25</a:t>
             </a:fld>
             <a:endParaRPr lang="en-US"/>
           </a:p>
@@ -3964,7 +3964,7 @@
           <a:p>
             <a:fld id="{7DA38F49-B3E2-4BF0-BEC7-C30D34ABBB8D}" type="datetime1">
               <a:rPr lang="en-US" smtClean="0"/>
-              <a:t>7/1/25</a:t>
+              <a:t>7/15/25</a:t>
             </a:fld>
             <a:endParaRPr lang="en-US"/>
           </a:p>
@@ -6323,7 +6323,15 @@
             </a:r>
             <a:r>
               <a:rPr lang="en-US" dirty="0"/>
-              <a:t>), AMZN(IaaS), GOOGL, META, NVDA</a:t>
+              <a:t>), AMZN(IaaS), GOOGL</a:t>
+            </a:r>
+            <a:r>
+              <a:rPr lang="en-US"/>
+              <a:t>, META(FB), </a:t>
+            </a:r>
+            <a:r>
+              <a:rPr lang="en-US" dirty="0"/>
+              <a:t>NVDA</a:t>
             </a:r>
           </a:p>
           <a:p>
